--- a/courses/learn_partitioning/module02-07-recursive-bisection/slides.pptx
+++ b/courses/learn_partitioning/module02-07-recursive-bisection/slides.pptx
@@ -16,6 +16,9 @@
     <p:sldId id="264" r:id="rId16"/>
     <p:sldId id="265" r:id="rId17"/>
     <p:sldId id="266" r:id="rId18"/>
+    <p:sldId id="267" r:id="rId19"/>
+    <p:sldId id="268" r:id="rId20"/>
+    <p:sldId id="269" r:id="rId21"/>
   </p:sldIdLst>
   <p:sldSz cx="12191695" cy="6858000" type="screen4x3"/>
   <p:notesSz cx="6858000" cy="9144000"/>
@@ -582,7 +585,7 @@
           <a:lstStyle/>
           <a:p>
             <a:r>
-              <a:t>Common traps: optimizing cut while ignoring balance; reporting pairwise cut when the instance is a hypergraph; flipping locked terminals; and stopping before rollback to the best KL or FM prefix. For multilevel flows, verify coarsening before you blame the refiner.</a:t>
+              <a:t>In the browser lab track, open the **recursive-bisection** lab from the tools shelf. Load the starter graph, run the algorithm once, and read cutsize and balance in the metrics panel. Work the challenges that lock the goldens, then come back to implement the same loop yourself.</a:t>
             </a:r>
           </a:p>
         </p:txBody>
@@ -652,6 +655,146 @@
           <a:lstStyle/>
           <a:p>
             <a:r>
+              <a:t>In the implement track, open this module's EXAMPLES.md Pseudocode section and the course common solvers. Parse the tiny graph, run the algorithm with a deterministic seed, and print the assignment plus cutsize and balance. Match the browser goldens before you claim the checklist.</a:t>
+            </a:r>
+          </a:p>
+        </p:txBody>
+      </p:sp>
+      <p:sp>
+        <p:nvSpPr>
+          <p:cNvPr id="4" name="Slide Number Placeholder 3"/>
+          <p:cNvSpPr>
+            <a:spLocks noGrp="1"/>
+          </p:cNvSpPr>
+          <p:nvPr>
+            <p:ph type="sldNum" idx="5" sz="quarter"/>
+          </p:nvPr>
+        </p:nvSpPr>
+        <p:spPr/>
+      </p:sp>
+    </p:spTree>
+  </p:cSld>
+  <p:clrMapOvr>
+    <a:masterClrMapping/>
+  </p:clrMapOvr>
+</p:notes>
+</file>
+
+<file path=ppt/notesSlides/notesSlide12.xml><?xml version="1.0" encoding="utf-8"?>
+<p:notes xmlns:a="http://schemas.openxmlformats.org/drawingml/2006/main" xmlns:p="http://schemas.openxmlformats.org/presentationml/2006/main" xmlns:r="http://schemas.openxmlformats.org/officeDocument/2006/relationships">
+  <p:cSld>
+    <p:spTree>
+      <p:nvGrpSpPr>
+        <p:cNvPr id="1" name=""/>
+        <p:cNvGrpSpPr/>
+        <p:nvPr/>
+      </p:nvGrpSpPr>
+      <p:grpSpPr>
+        <a:xfrm>
+          <a:off x="0" y="0"/>
+          <a:ext cx="0" cy="0"/>
+          <a:chOff x="0" y="0"/>
+          <a:chExt cx="0" cy="0"/>
+        </a:xfrm>
+      </p:grpSpPr>
+      <p:sp>
+        <p:nvSpPr>
+          <p:cNvPr id="2" name="Slide Image Placeholder 1"/>
+          <p:cNvSpPr>
+            <a:spLocks noGrp="1"/>
+          </p:cNvSpPr>
+          <p:nvPr>
+            <p:ph type="sldImg" idx="2"/>
+          </p:nvPr>
+        </p:nvSpPr>
+        <p:spPr/>
+      </p:sp>
+      <p:sp>
+        <p:nvSpPr>
+          <p:cNvPr id="3" name="Notes Placeholder 2"/>
+          <p:cNvSpPr>
+            <a:spLocks noGrp="1"/>
+          </p:cNvSpPr>
+          <p:nvPr>
+            <p:ph type="body" idx="3" sz="quarter"/>
+          </p:nvPr>
+        </p:nvSpPr>
+        <p:spPr/>
+        <p:txBody>
+          <a:bodyPr/>
+          <a:lstStyle/>
+          <a:p>
+            <a:r>
+              <a:t>Common traps: optimizing cut while ignoring balance; reporting pairwise cut when the instance is a hypergraph; flipping locked terminals; and stopping before rollback to the best KL or FM prefix. For multilevel flows, verify coarsening before you blame the refiner.</a:t>
+            </a:r>
+          </a:p>
+        </p:txBody>
+      </p:sp>
+      <p:sp>
+        <p:nvSpPr>
+          <p:cNvPr id="4" name="Slide Number Placeholder 3"/>
+          <p:cNvSpPr>
+            <a:spLocks noGrp="1"/>
+          </p:cNvSpPr>
+          <p:nvPr>
+            <p:ph type="sldNum" idx="5" sz="quarter"/>
+          </p:nvPr>
+        </p:nvSpPr>
+        <p:spPr/>
+      </p:sp>
+    </p:spTree>
+  </p:cSld>
+  <p:clrMapOvr>
+    <a:masterClrMapping/>
+  </p:clrMapOvr>
+</p:notes>
+</file>
+
+<file path=ppt/notesSlides/notesSlide13.xml><?xml version="1.0" encoding="utf-8"?>
+<p:notes xmlns:a="http://schemas.openxmlformats.org/drawingml/2006/main" xmlns:p="http://schemas.openxmlformats.org/presentationml/2006/main" xmlns:r="http://schemas.openxmlformats.org/officeDocument/2006/relationships">
+  <p:cSld>
+    <p:spTree>
+      <p:nvGrpSpPr>
+        <p:cNvPr id="1" name=""/>
+        <p:cNvGrpSpPr/>
+        <p:nvPr/>
+      </p:nvGrpSpPr>
+      <p:grpSpPr>
+        <a:xfrm>
+          <a:off x="0" y="0"/>
+          <a:ext cx="0" cy="0"/>
+          <a:chOff x="0" y="0"/>
+          <a:chExt cx="0" cy="0"/>
+        </a:xfrm>
+      </p:grpSpPr>
+      <p:sp>
+        <p:nvSpPr>
+          <p:cNvPr id="2" name="Slide Image Placeholder 1"/>
+          <p:cNvSpPr>
+            <a:spLocks noGrp="1"/>
+          </p:cNvSpPr>
+          <p:nvPr>
+            <p:ph type="sldImg" idx="2"/>
+          </p:nvPr>
+        </p:nvSpPr>
+        <p:spPr/>
+      </p:sp>
+      <p:sp>
+        <p:nvSpPr>
+          <p:cNvPr id="3" name="Notes Placeholder 2"/>
+          <p:cNvSpPr>
+            <a:spLocks noGrp="1"/>
+          </p:cNvSpPr>
+          <p:nvPr>
+            <p:ph type="body" idx="3" sz="quarter"/>
+          </p:nvPr>
+        </p:nvSpPr>
+        <p:spPr/>
+        <p:txBody>
+          <a:bodyPr/>
+          <a:lstStyle/>
+          <a:p>
+            <a:r>
               <a:t>Complete the checklist for at least one track—preferably both. Implement until your metrics match the starter goldens. When you’re ready, take the short quiz, then continue to the next module.</a:t>
             </a:r>
           </a:p>
@@ -725,12 +868,6 @@
               <a:t>Each step is an ordinary bipartition on an induced subgraph. Quality compounds: a weak first cut leaves later bisectors fewer good options. Always report total cut across all part boundaries and the part-size vector.</a:t>
             </a:r>
           </a:p>
-          <a:p/>
-          <a:p>
-            <a:r>
-              <a:t>&lt;!-- algorithm-walkthrough --&gt;</a:t>
-            </a:r>
-          </a:p>
         </p:txBody>
       </p:sp>
       <p:sp>
@@ -798,7 +935,13 @@
           <a:lstStyle/>
           <a:p>
             <a:r>
-              <a:t>Recursive bisection builds k-way partitions by repeated 2-way splits. Target k=4 on TINY_GRAPH: bisect the largest part until four labels exist.</a:t>
+              <a:t>Recursive bisection is a loop over parts: while you have fewer than k parts, split the largest with a bipartitioner and replace it by the two halves.</a:t>
+            </a:r>
+          </a:p>
+          <a:p/>
+          <a:p>
+            <a:r>
+              <a:t>Open this module's examples file and find the Pseudocode section. That written sketch is what you implement on the implement track and what the browser challenges measure.</a:t>
             </a:r>
           </a:p>
         </p:txBody>
@@ -868,7 +1011,7 @@
           <a:lstStyle/>
           <a:p>
             <a:r>
-              <a:t>First spectral split on the whole graph yields ABC|DE — same golden bipartition with cutsize 3. Two parts remain; need two more splits.</a:t>
+              <a:t>First split yields ABC versus DE at cut three. For k equals three the sketch bisects ABC next into A B versus C with D E untouched.</a:t>
             </a:r>
           </a:p>
         </p:txBody>
@@ -938,7 +1081,7 @@
           <a:lstStyle/>
           <a:p>
             <a:r>
-              <a:t>Largest part ABC (size 3) is bisected next. A and B stay together (w=5); C becomes its own part. Three parts: AB, C, DE.</a:t>
+              <a:t>Recursive bisection builds k-way partitions by repeated 2-way splits. Target k=4 on TINY_GRAPH: bisect the largest part until four labels exist.</a:t>
             </a:r>
           </a:p>
         </p:txBody>
@@ -1008,7 +1151,7 @@
           <a:lstStyle/>
           <a:p>
             <a:r>
-              <a:t>Largest remaining part DE is bisected, cutting the weight-5 D–E edge. Final four parts: AB, C, D, E singleton aside from AB pair.</a:t>
+              <a:t>First spectral split on the whole graph yields ABC|DE — same golden bipartition with cutsize 3. Two parts remain; need two more splits.</a:t>
             </a:r>
           </a:p>
         </p:txBody>
@@ -1078,13 +1221,7 @@
           <a:lstStyle/>
           <a:p>
             <a:r>
-              <a:t>k=4 costs cut 13 because splitting DE destroys the weight-5 edge. k=3 stops earlier at AB|C|DE cut 8 — fewer splits can mean lower total cut.</a:t>
-            </a:r>
-          </a:p>
-          <a:p/>
-          <a:p>
-            <a:r>
-              <a:t>&lt;!-- /algorithm-walkthrough --&gt;</a:t>
+              <a:t>Largest part ABC (size 3) is bisected next. A and B stay together (w=5); C becomes its own part. Three parts: AB, C, DE.</a:t>
             </a:r>
           </a:p>
         </p:txBody>
@@ -1154,7 +1291,7 @@
           <a:lstStyle/>
           <a:p>
             <a:r>
-              <a:t>In the browser lab track, open the **recursive-bisection** lab from the tools shelf. Load the starter graph, run the algorithm once, and read cutsize and balance in the metrics panel. Work the challenges that lock the goldens, then come back to implement the same loop yourself.</a:t>
+              <a:t>Largest remaining part DE is bisected, cutting the weight-5 D–E edge. Final four parts: AB, C, D, E singleton aside from AB pair.</a:t>
             </a:r>
           </a:p>
         </p:txBody>
@@ -1224,7 +1361,7 @@
           <a:lstStyle/>
           <a:p>
             <a:r>
-              <a:t>In the implement track, open this module’s examples and the course `common/` solvers. Parse the tiny graph, run the algorithm with a deterministic seed, and print the assignment plus cutsize and balance. Match the browser goldens before you claim the checklist.</a:t>
+              <a:t>k=4 costs cut 13 because splitting DE destroys the weight-5 edge. k=3 stops earlier at AB|C|DE cut 8 — fewer splits can mean lower total cut.</a:t>
             </a:r>
           </a:p>
         </p:txBody>
@@ -4382,21 +4519,45 @@
                 </a:solidFill>
                 <a:latin typeface="Calibri"/>
               </a:rPr>
-              <a:t>Pitfalls</a:t>
-            </a:r>
-          </a:p>
-        </p:txBody>
-      </p:sp>
-      <p:sp>
-        <p:nvSpPr>
-          <p:cNvPr id="3" name="TextBox 2"/>
+              <a:t>Recursive bisection tradeoff</a:t>
+            </a:r>
+          </a:p>
+        </p:txBody>
+      </p:sp>
+      <p:pic>
+        <p:nvPicPr>
+          <p:cNvPr id="3" name="Picture 2" descr="05-takeaway.png"/>
+          <p:cNvPicPr>
+            <a:picLocks noChangeAspect="1"/>
+          </p:cNvPicPr>
+          <p:nvPr/>
+        </p:nvPicPr>
+        <p:blipFill>
+          <a:blip r:embed="rId2"/>
+          <a:stretch>
+            <a:fillRect/>
+          </a:stretch>
+        </p:blipFill>
+        <p:spPr>
+          <a:xfrm>
+            <a:off x="548640" y="1143000"/>
+            <a:ext cx="9404113" cy="4572000"/>
+          </a:xfrm>
+          <a:prstGeom prst="rect">
+            <a:avLst/>
+          </a:prstGeom>
+        </p:spPr>
+      </p:pic>
+      <p:sp>
+        <p:nvSpPr>
+          <p:cNvPr id="4" name="TextBox 3"/>
           <p:cNvSpPr txBox="1"/>
           <p:nvPr/>
         </p:nvSpPr>
         <p:spPr>
           <a:xfrm>
-            <a:off x="548640" y="1234440"/>
-            <a:ext cx="11064240" cy="4937760"/>
+            <a:off x="548640" y="5897880"/>
+            <a:ext cx="11064240" cy="411480"/>
           </a:xfrm>
           <a:prstGeom prst="rect">
             <a:avLst/>
@@ -4409,54 +4570,26 @@
           </a:bodyPr>
           <a:lstStyle/>
           <a:p>
-            <a:pPr lvl="0" marL="457200" indent="-228600">
-              <a:buFont typeface="Calibri"/>
-              <a:spcAft>
-                <a:spcPts val="1000"/>
-              </a:spcAft>
-              <a:buSzPct val="100000"/>
-              <a:buChar char="•"/>
+            <a:pPr>
               <a:lnSpc>
                 <a:spcPts val="2200"/>
               </a:lnSpc>
             </a:pPr>
             <a:r>
-              <a:rPr sz="2000" b="0">
+              <a:rPr sz="1200" b="0">
                 <a:solidFill>
                   <a:srgbClr val="333333"/>
                 </a:solidFill>
                 <a:latin typeface="Calibri"/>
               </a:rPr>
-              <a:t>Common traps</a:t>
-            </a:r>
-          </a:p>
-          <a:p>
-            <a:pPr lvl="0" marL="457200" indent="-228600">
-              <a:buFont typeface="Calibri"/>
-              <a:spcAft>
-                <a:spcPts val="1000"/>
-              </a:spcAft>
-              <a:buSzPct val="100000"/>
-              <a:buChar char="•"/>
-              <a:lnSpc>
-                <a:spcPts val="2200"/>
-              </a:lnSpc>
-            </a:pPr>
-            <a:r>
-              <a:rPr sz="2000" b="0">
-                <a:solidFill>
-                  <a:srgbClr val="333333"/>
-                </a:solidFill>
-                <a:latin typeface="Calibri"/>
-              </a:rPr>
-              <a:t>For multilevel flows, verify coarsening before you blame the refiner</a:t>
-            </a:r>
-          </a:p>
-        </p:txBody>
-      </p:sp>
-      <p:sp>
-        <p:nvSpPr>
-          <p:cNvPr id="4" name="TextBox 3"/>
+              <a:t>Recursive bisection tradeoff</a:t>
+            </a:r>
+          </a:p>
+        </p:txBody>
+      </p:sp>
+      <p:sp>
+        <p:nvSpPr>
+          <p:cNvPr id="5" name="TextBox 4"/>
           <p:cNvSpPr txBox="1"/>
           <p:nvPr/>
         </p:nvSpPr>
@@ -4545,6 +4678,557 @@
                 </a:solidFill>
                 <a:latin typeface="Calibri"/>
               </a:rPr>
+              <a:t>Browser lab track</a:t>
+            </a:r>
+          </a:p>
+        </p:txBody>
+      </p:sp>
+      <p:sp>
+        <p:nvSpPr>
+          <p:cNvPr id="3" name="TextBox 2"/>
+          <p:cNvSpPr txBox="1"/>
+          <p:nvPr/>
+        </p:nvSpPr>
+        <p:spPr>
+          <a:xfrm>
+            <a:off x="548640" y="1234440"/>
+            <a:ext cx="11064240" cy="4937760"/>
+          </a:xfrm>
+          <a:prstGeom prst="rect">
+            <a:avLst/>
+          </a:prstGeom>
+          <a:noFill/>
+        </p:spPr>
+        <p:txBody>
+          <a:bodyPr wrap="square">
+            <a:noAutofit/>
+          </a:bodyPr>
+          <a:lstStyle/>
+          <a:p>
+            <a:pPr lvl="0" marL="457200" indent="-228600">
+              <a:buFont typeface="Calibri"/>
+              <a:spcAft>
+                <a:spcPts val="1000"/>
+              </a:spcAft>
+              <a:buSzPct val="100000"/>
+              <a:buChar char="•"/>
+              <a:lnSpc>
+                <a:spcPts val="2200"/>
+              </a:lnSpc>
+            </a:pPr>
+            <a:r>
+              <a:rPr sz="2000" b="0">
+                <a:solidFill>
+                  <a:srgbClr val="333333"/>
+                </a:solidFill>
+                <a:latin typeface="Calibri"/>
+              </a:rPr>
+              <a:t>In the browser lab track, open the </a:t>
+            </a:r>
+            <a:r>
+              <a:rPr sz="2000" b="1">
+                <a:solidFill>
+                  <a:srgbClr val="333333"/>
+                </a:solidFill>
+                <a:latin typeface="Calibri"/>
+              </a:rPr>
+              <a:t>recursive-bisection</a:t>
+            </a:r>
+            <a:r>
+              <a:rPr sz="2000" b="0">
+                <a:solidFill>
+                  <a:srgbClr val="333333"/>
+                </a:solidFill>
+                <a:latin typeface="Calibri"/>
+              </a:rPr>
+              <a:t> lab from the tools shelf</a:t>
+            </a:r>
+          </a:p>
+          <a:p>
+            <a:pPr lvl="0" marL="457200" indent="-228600">
+              <a:buFont typeface="Calibri"/>
+              <a:spcAft>
+                <a:spcPts val="1000"/>
+              </a:spcAft>
+              <a:buSzPct val="100000"/>
+              <a:buChar char="•"/>
+              <a:lnSpc>
+                <a:spcPts val="2200"/>
+              </a:lnSpc>
+            </a:pPr>
+            <a:r>
+              <a:rPr sz="2000" b="0">
+                <a:solidFill>
+                  <a:srgbClr val="333333"/>
+                </a:solidFill>
+                <a:latin typeface="Calibri"/>
+              </a:rPr>
+              <a:t>Load the starter graph, run the algorithm once</a:t>
+            </a:r>
+          </a:p>
+          <a:p>
+            <a:pPr lvl="0" marL="457200" indent="-228600">
+              <a:buFont typeface="Calibri"/>
+              <a:spcAft>
+                <a:spcPts val="1000"/>
+              </a:spcAft>
+              <a:buSzPct val="100000"/>
+              <a:buChar char="•"/>
+              <a:lnSpc>
+                <a:spcPts val="2200"/>
+              </a:lnSpc>
+            </a:pPr>
+            <a:r>
+              <a:rPr sz="2000" b="0">
+                <a:solidFill>
+                  <a:srgbClr val="333333"/>
+                </a:solidFill>
+                <a:latin typeface="Calibri"/>
+              </a:rPr>
+              <a:t>Work the challenges that lock the goldens</a:t>
+            </a:r>
+          </a:p>
+        </p:txBody>
+      </p:sp>
+      <p:sp>
+        <p:nvSpPr>
+          <p:cNvPr id="4" name="TextBox 3"/>
+          <p:cNvSpPr txBox="1"/>
+          <p:nvPr/>
+        </p:nvSpPr>
+        <p:spPr>
+          <a:xfrm>
+            <a:off x="548640" y="6355080"/>
+            <a:ext cx="11064240" cy="320040"/>
+          </a:xfrm>
+          <a:prstGeom prst="rect">
+            <a:avLst/>
+          </a:prstGeom>
+          <a:noFill/>
+        </p:spPr>
+        <p:txBody>
+          <a:bodyPr wrap="square">
+            <a:noAutofit/>
+          </a:bodyPr>
+          <a:lstStyle/>
+          <a:p>
+            <a:pPr algn="r">
+              <a:lnSpc>
+                <a:spcPts val="2200"/>
+              </a:lnSpc>
+              <a:defRPr sz="1000" b="0">
+                <a:solidFill>
+                  <a:srgbClr val="666666"/>
+                </a:solidFill>
+                <a:latin typeface="Calibri"/>
+              </a:defRPr>
+            </a:pPr>
+            <a:r>
+              <a:t>learn_partitioning — 07 recursive bisection</a:t>
+            </a:r>
+          </a:p>
+        </p:txBody>
+      </p:sp>
+    </p:spTree>
+  </p:cSld>
+  <p:clrMapOvr>
+    <a:masterClrMapping/>
+  </p:clrMapOvr>
+</p:sld>
+</file>
+
+<file path=ppt/slides/slide12.xml><?xml version="1.0" encoding="utf-8"?>
+<p:sld xmlns:a="http://schemas.openxmlformats.org/drawingml/2006/main" xmlns:p="http://schemas.openxmlformats.org/presentationml/2006/main" xmlns:r="http://schemas.openxmlformats.org/officeDocument/2006/relationships">
+  <p:cSld>
+    <p:spTree>
+      <p:nvGrpSpPr>
+        <p:cNvPr id="1" name=""/>
+        <p:cNvGrpSpPr/>
+        <p:nvPr/>
+      </p:nvGrpSpPr>
+      <p:grpSpPr/>
+      <p:sp>
+        <p:nvSpPr>
+          <p:cNvPr id="2" name="TextBox 1"/>
+          <p:cNvSpPr txBox="1"/>
+          <p:nvPr/>
+        </p:nvSpPr>
+        <p:spPr>
+          <a:xfrm>
+            <a:off x="548640" y="411480"/>
+            <a:ext cx="11064240" cy="777240"/>
+          </a:xfrm>
+          <a:prstGeom prst="rect">
+            <a:avLst/>
+          </a:prstGeom>
+          <a:noFill/>
+        </p:spPr>
+        <p:txBody>
+          <a:bodyPr wrap="square">
+            <a:noAutofit/>
+          </a:bodyPr>
+          <a:lstStyle/>
+          <a:p>
+            <a:pPr>
+              <a:lnSpc>
+                <a:spcPts val="2200"/>
+              </a:lnSpc>
+            </a:pPr>
+            <a:r>
+              <a:rPr sz="2800" b="1">
+                <a:solidFill>
+                  <a:srgbClr val="1A1A2E"/>
+                </a:solidFill>
+                <a:latin typeface="Calibri"/>
+              </a:rPr>
+              <a:t>Implement track</a:t>
+            </a:r>
+          </a:p>
+        </p:txBody>
+      </p:sp>
+      <p:sp>
+        <p:nvSpPr>
+          <p:cNvPr id="3" name="TextBox 2"/>
+          <p:cNvSpPr txBox="1"/>
+          <p:nvPr/>
+        </p:nvSpPr>
+        <p:spPr>
+          <a:xfrm>
+            <a:off x="548640" y="1234440"/>
+            <a:ext cx="11064240" cy="4937760"/>
+          </a:xfrm>
+          <a:prstGeom prst="rect">
+            <a:avLst/>
+          </a:prstGeom>
+          <a:noFill/>
+        </p:spPr>
+        <p:txBody>
+          <a:bodyPr wrap="square">
+            <a:noAutofit/>
+          </a:bodyPr>
+          <a:lstStyle/>
+          <a:p>
+            <a:pPr lvl="0" marL="457200" indent="-228600">
+              <a:buFont typeface="Calibri"/>
+              <a:spcAft>
+                <a:spcPts val="1000"/>
+              </a:spcAft>
+              <a:buSzPct val="100000"/>
+              <a:buChar char="•"/>
+              <a:lnSpc>
+                <a:spcPts val="2200"/>
+              </a:lnSpc>
+            </a:pPr>
+            <a:r>
+              <a:rPr sz="2000" b="0">
+                <a:solidFill>
+                  <a:srgbClr val="333333"/>
+                </a:solidFill>
+                <a:latin typeface="Calibri"/>
+              </a:rPr>
+              <a:t>In the implement track</a:t>
+            </a:r>
+          </a:p>
+          <a:p>
+            <a:pPr lvl="0" marL="457200" indent="-228600">
+              <a:buFont typeface="Calibri"/>
+              <a:spcAft>
+                <a:spcPts val="1000"/>
+              </a:spcAft>
+              <a:buSzPct val="100000"/>
+              <a:buChar char="•"/>
+              <a:lnSpc>
+                <a:spcPts val="2200"/>
+              </a:lnSpc>
+            </a:pPr>
+            <a:r>
+              <a:rPr sz="2000" b="0">
+                <a:solidFill>
+                  <a:srgbClr val="333333"/>
+                </a:solidFill>
+                <a:latin typeface="Calibri"/>
+              </a:rPr>
+              <a:t>Parse the tiny graph, run the algorithm with a deterministic seed</a:t>
+            </a:r>
+          </a:p>
+          <a:p>
+            <a:pPr lvl="0" marL="457200" indent="-228600">
+              <a:buFont typeface="Calibri"/>
+              <a:spcAft>
+                <a:spcPts val="1000"/>
+              </a:spcAft>
+              <a:buSzPct val="100000"/>
+              <a:buChar char="•"/>
+              <a:lnSpc>
+                <a:spcPts val="2200"/>
+              </a:lnSpc>
+            </a:pPr>
+            <a:r>
+              <a:rPr sz="2000" b="0">
+                <a:solidFill>
+                  <a:srgbClr val="333333"/>
+                </a:solidFill>
+                <a:latin typeface="Calibri"/>
+              </a:rPr>
+              <a:t>Match the browser goldens before you claim the checklist</a:t>
+            </a:r>
+          </a:p>
+        </p:txBody>
+      </p:sp>
+      <p:sp>
+        <p:nvSpPr>
+          <p:cNvPr id="4" name="TextBox 3"/>
+          <p:cNvSpPr txBox="1"/>
+          <p:nvPr/>
+        </p:nvSpPr>
+        <p:spPr>
+          <a:xfrm>
+            <a:off x="548640" y="6355080"/>
+            <a:ext cx="11064240" cy="320040"/>
+          </a:xfrm>
+          <a:prstGeom prst="rect">
+            <a:avLst/>
+          </a:prstGeom>
+          <a:noFill/>
+        </p:spPr>
+        <p:txBody>
+          <a:bodyPr wrap="square">
+            <a:noAutofit/>
+          </a:bodyPr>
+          <a:lstStyle/>
+          <a:p>
+            <a:pPr algn="r">
+              <a:lnSpc>
+                <a:spcPts val="2200"/>
+              </a:lnSpc>
+              <a:defRPr sz="1000" b="0">
+                <a:solidFill>
+                  <a:srgbClr val="666666"/>
+                </a:solidFill>
+                <a:latin typeface="Calibri"/>
+              </a:defRPr>
+            </a:pPr>
+            <a:r>
+              <a:t>learn_partitioning — 07 recursive bisection</a:t>
+            </a:r>
+          </a:p>
+        </p:txBody>
+      </p:sp>
+    </p:spTree>
+  </p:cSld>
+  <p:clrMapOvr>
+    <a:masterClrMapping/>
+  </p:clrMapOvr>
+</p:sld>
+</file>
+
+<file path=ppt/slides/slide13.xml><?xml version="1.0" encoding="utf-8"?>
+<p:sld xmlns:a="http://schemas.openxmlformats.org/drawingml/2006/main" xmlns:p="http://schemas.openxmlformats.org/presentationml/2006/main" xmlns:r="http://schemas.openxmlformats.org/officeDocument/2006/relationships">
+  <p:cSld>
+    <p:spTree>
+      <p:nvGrpSpPr>
+        <p:cNvPr id="1" name=""/>
+        <p:cNvGrpSpPr/>
+        <p:nvPr/>
+      </p:nvGrpSpPr>
+      <p:grpSpPr/>
+      <p:sp>
+        <p:nvSpPr>
+          <p:cNvPr id="2" name="TextBox 1"/>
+          <p:cNvSpPr txBox="1"/>
+          <p:nvPr/>
+        </p:nvSpPr>
+        <p:spPr>
+          <a:xfrm>
+            <a:off x="548640" y="411480"/>
+            <a:ext cx="11064240" cy="777240"/>
+          </a:xfrm>
+          <a:prstGeom prst="rect">
+            <a:avLst/>
+          </a:prstGeom>
+          <a:noFill/>
+        </p:spPr>
+        <p:txBody>
+          <a:bodyPr wrap="square">
+            <a:noAutofit/>
+          </a:bodyPr>
+          <a:lstStyle/>
+          <a:p>
+            <a:pPr>
+              <a:lnSpc>
+                <a:spcPts val="2200"/>
+              </a:lnSpc>
+            </a:pPr>
+            <a:r>
+              <a:rPr sz="2800" b="1">
+                <a:solidFill>
+                  <a:srgbClr val="1A1A2E"/>
+                </a:solidFill>
+                <a:latin typeface="Calibri"/>
+              </a:rPr>
+              <a:t>Pitfalls</a:t>
+            </a:r>
+          </a:p>
+        </p:txBody>
+      </p:sp>
+      <p:sp>
+        <p:nvSpPr>
+          <p:cNvPr id="3" name="TextBox 2"/>
+          <p:cNvSpPr txBox="1"/>
+          <p:nvPr/>
+        </p:nvSpPr>
+        <p:spPr>
+          <a:xfrm>
+            <a:off x="548640" y="1234440"/>
+            <a:ext cx="11064240" cy="4937760"/>
+          </a:xfrm>
+          <a:prstGeom prst="rect">
+            <a:avLst/>
+          </a:prstGeom>
+          <a:noFill/>
+        </p:spPr>
+        <p:txBody>
+          <a:bodyPr wrap="square">
+            <a:noAutofit/>
+          </a:bodyPr>
+          <a:lstStyle/>
+          <a:p>
+            <a:pPr lvl="0" marL="457200" indent="-228600">
+              <a:buFont typeface="Calibri"/>
+              <a:spcAft>
+                <a:spcPts val="1000"/>
+              </a:spcAft>
+              <a:buSzPct val="100000"/>
+              <a:buChar char="•"/>
+              <a:lnSpc>
+                <a:spcPts val="2200"/>
+              </a:lnSpc>
+            </a:pPr>
+            <a:r>
+              <a:rPr sz="2000" b="0">
+                <a:solidFill>
+                  <a:srgbClr val="333333"/>
+                </a:solidFill>
+                <a:latin typeface="Calibri"/>
+              </a:rPr>
+              <a:t>Common traps</a:t>
+            </a:r>
+          </a:p>
+          <a:p>
+            <a:pPr lvl="0" marL="457200" indent="-228600">
+              <a:buFont typeface="Calibri"/>
+              <a:spcAft>
+                <a:spcPts val="1000"/>
+              </a:spcAft>
+              <a:buSzPct val="100000"/>
+              <a:buChar char="•"/>
+              <a:lnSpc>
+                <a:spcPts val="2200"/>
+              </a:lnSpc>
+            </a:pPr>
+            <a:r>
+              <a:rPr sz="2000" b="0">
+                <a:solidFill>
+                  <a:srgbClr val="333333"/>
+                </a:solidFill>
+                <a:latin typeface="Calibri"/>
+              </a:rPr>
+              <a:t>For multilevel flows, verify coarsening before you blame the refiner</a:t>
+            </a:r>
+          </a:p>
+        </p:txBody>
+      </p:sp>
+      <p:sp>
+        <p:nvSpPr>
+          <p:cNvPr id="4" name="TextBox 3"/>
+          <p:cNvSpPr txBox="1"/>
+          <p:nvPr/>
+        </p:nvSpPr>
+        <p:spPr>
+          <a:xfrm>
+            <a:off x="548640" y="6355080"/>
+            <a:ext cx="11064240" cy="320040"/>
+          </a:xfrm>
+          <a:prstGeom prst="rect">
+            <a:avLst/>
+          </a:prstGeom>
+          <a:noFill/>
+        </p:spPr>
+        <p:txBody>
+          <a:bodyPr wrap="square">
+            <a:noAutofit/>
+          </a:bodyPr>
+          <a:lstStyle/>
+          <a:p>
+            <a:pPr algn="r">
+              <a:lnSpc>
+                <a:spcPts val="2200"/>
+              </a:lnSpc>
+              <a:defRPr sz="1000" b="0">
+                <a:solidFill>
+                  <a:srgbClr val="666666"/>
+                </a:solidFill>
+                <a:latin typeface="Calibri"/>
+              </a:defRPr>
+            </a:pPr>
+            <a:r>
+              <a:t>learn_partitioning — 07 recursive bisection</a:t>
+            </a:r>
+          </a:p>
+        </p:txBody>
+      </p:sp>
+    </p:spTree>
+  </p:cSld>
+  <p:clrMapOvr>
+    <a:masterClrMapping/>
+  </p:clrMapOvr>
+</p:sld>
+</file>
+
+<file path=ppt/slides/slide14.xml><?xml version="1.0" encoding="utf-8"?>
+<p:sld xmlns:a="http://schemas.openxmlformats.org/drawingml/2006/main" xmlns:p="http://schemas.openxmlformats.org/presentationml/2006/main" xmlns:r="http://schemas.openxmlformats.org/officeDocument/2006/relationships">
+  <p:cSld>
+    <p:spTree>
+      <p:nvGrpSpPr>
+        <p:cNvPr id="1" name=""/>
+        <p:cNvGrpSpPr/>
+        <p:nvPr/>
+      </p:nvGrpSpPr>
+      <p:grpSpPr/>
+      <p:sp>
+        <p:nvSpPr>
+          <p:cNvPr id="2" name="TextBox 1"/>
+          <p:cNvSpPr txBox="1"/>
+          <p:nvPr/>
+        </p:nvSpPr>
+        <p:spPr>
+          <a:xfrm>
+            <a:off x="548640" y="411480"/>
+            <a:ext cx="11064240" cy="777240"/>
+          </a:xfrm>
+          <a:prstGeom prst="rect">
+            <a:avLst/>
+          </a:prstGeom>
+          <a:noFill/>
+        </p:spPr>
+        <p:txBody>
+          <a:bodyPr wrap="square">
+            <a:noAutofit/>
+          </a:bodyPr>
+          <a:lstStyle/>
+          <a:p>
+            <a:pPr>
+              <a:lnSpc>
+                <a:spcPts val="2200"/>
+              </a:lnSpc>
+            </a:pPr>
+            <a:r>
+              <a:rPr sz="2800" b="1">
+                <a:solidFill>
+                  <a:srgbClr val="1A1A2E"/>
+                </a:solidFill>
+                <a:latin typeface="Calibri"/>
+              </a:rPr>
               <a:t>Your turn</a:t>
             </a:r>
           </a:p>
@@ -4822,6 +5506,125 @@
               <a:t>Always report total cut across all part boundaries and the part-size vector</a:t>
             </a:r>
           </a:p>
+        </p:txBody>
+      </p:sp>
+      <p:sp>
+        <p:nvSpPr>
+          <p:cNvPr id="4" name="TextBox 3"/>
+          <p:cNvSpPr txBox="1"/>
+          <p:nvPr/>
+        </p:nvSpPr>
+        <p:spPr>
+          <a:xfrm>
+            <a:off x="548640" y="6355080"/>
+            <a:ext cx="11064240" cy="320040"/>
+          </a:xfrm>
+          <a:prstGeom prst="rect">
+            <a:avLst/>
+          </a:prstGeom>
+          <a:noFill/>
+        </p:spPr>
+        <p:txBody>
+          <a:bodyPr wrap="square">
+            <a:noAutofit/>
+          </a:bodyPr>
+          <a:lstStyle/>
+          <a:p>
+            <a:pPr algn="r">
+              <a:lnSpc>
+                <a:spcPts val="2200"/>
+              </a:lnSpc>
+              <a:defRPr sz="1000" b="0">
+                <a:solidFill>
+                  <a:srgbClr val="666666"/>
+                </a:solidFill>
+                <a:latin typeface="Calibri"/>
+              </a:defRPr>
+            </a:pPr>
+            <a:r>
+              <a:t>learn_partitioning — 07 recursive bisection</a:t>
+            </a:r>
+          </a:p>
+        </p:txBody>
+      </p:sp>
+    </p:spTree>
+  </p:cSld>
+  <p:clrMapOvr>
+    <a:masterClrMapping/>
+  </p:clrMapOvr>
+</p:sld>
+</file>
+
+<file path=ppt/slides/slide3.xml><?xml version="1.0" encoding="utf-8"?>
+<p:sld xmlns:a="http://schemas.openxmlformats.org/drawingml/2006/main" xmlns:p="http://schemas.openxmlformats.org/presentationml/2006/main" xmlns:r="http://schemas.openxmlformats.org/officeDocument/2006/relationships">
+  <p:cSld>
+    <p:spTree>
+      <p:nvGrpSpPr>
+        <p:cNvPr id="1" name=""/>
+        <p:cNvGrpSpPr/>
+        <p:nvPr/>
+      </p:nvGrpSpPr>
+      <p:grpSpPr/>
+      <p:sp>
+        <p:nvSpPr>
+          <p:cNvPr id="2" name="TextBox 1"/>
+          <p:cNvSpPr txBox="1"/>
+          <p:nvPr/>
+        </p:nvSpPr>
+        <p:spPr>
+          <a:xfrm>
+            <a:off x="548640" y="411480"/>
+            <a:ext cx="11064240" cy="777240"/>
+          </a:xfrm>
+          <a:prstGeom prst="rect">
+            <a:avLst/>
+          </a:prstGeom>
+          <a:noFill/>
+        </p:spPr>
+        <p:txBody>
+          <a:bodyPr wrap="square">
+            <a:noAutofit/>
+          </a:bodyPr>
+          <a:lstStyle/>
+          <a:p>
+            <a:pPr>
+              <a:lnSpc>
+                <a:spcPts val="2200"/>
+              </a:lnSpc>
+            </a:pPr>
+            <a:r>
+              <a:rPr sz="2800" b="1">
+                <a:solidFill>
+                  <a:srgbClr val="1A1A2E"/>
+                </a:solidFill>
+                <a:latin typeface="Calibri"/>
+              </a:rPr>
+              <a:t>Pseudocode</a:t>
+            </a:r>
+          </a:p>
+        </p:txBody>
+      </p:sp>
+      <p:sp>
+        <p:nvSpPr>
+          <p:cNvPr id="3" name="TextBox 2"/>
+          <p:cNvSpPr txBox="1"/>
+          <p:nvPr/>
+        </p:nvSpPr>
+        <p:spPr>
+          <a:xfrm>
+            <a:off x="548640" y="1234440"/>
+            <a:ext cx="11064240" cy="4937760"/>
+          </a:xfrm>
+          <a:prstGeom prst="rect">
+            <a:avLst/>
+          </a:prstGeom>
+          <a:noFill/>
+        </p:spPr>
+        <p:txBody>
+          <a:bodyPr wrap="square">
+            <a:noAutofit/>
+          </a:bodyPr>
+          <a:lstStyle/>
           <a:p>
             <a:pPr lvl="0" marL="457200" indent="-228600">
               <a:buFont typeface="Calibri"/>
@@ -4841,7 +5644,51 @@
                 </a:solidFill>
                 <a:latin typeface="Calibri"/>
               </a:rPr>
-              <a:t>&lt;!-- algorithm-walkthrough --&gt;</a:t>
+              <a:t>Recursive bisection is a loop over parts</a:t>
+            </a:r>
+          </a:p>
+          <a:p>
+            <a:pPr lvl="0" marL="457200" indent="-228600">
+              <a:buFont typeface="Calibri"/>
+              <a:spcAft>
+                <a:spcPts val="1000"/>
+              </a:spcAft>
+              <a:buSzPct val="100000"/>
+              <a:buChar char="•"/>
+              <a:lnSpc>
+                <a:spcPts val="2200"/>
+              </a:lnSpc>
+            </a:pPr>
+            <a:r>
+              <a:rPr sz="2000" b="0">
+                <a:solidFill>
+                  <a:srgbClr val="333333"/>
+                </a:solidFill>
+                <a:latin typeface="Calibri"/>
+              </a:rPr>
+              <a:t>Open this module's examples file and find the Pseudocode section</a:t>
+            </a:r>
+          </a:p>
+          <a:p>
+            <a:pPr lvl="0" marL="457200" indent="-228600">
+              <a:buFont typeface="Calibri"/>
+              <a:spcAft>
+                <a:spcPts val="1000"/>
+              </a:spcAft>
+              <a:buSzPct val="100000"/>
+              <a:buChar char="•"/>
+              <a:lnSpc>
+                <a:spcPts val="2200"/>
+              </a:lnSpc>
+            </a:pPr>
+            <a:r>
+              <a:rPr sz="2000" b="0">
+                <a:solidFill>
+                  <a:srgbClr val="333333"/>
+                </a:solidFill>
+                <a:latin typeface="Calibri"/>
+              </a:rPr>
+              <a:t>That written sketch is what you implement on the implement track and what the browser</a:t>
             </a:r>
           </a:p>
         </p:txBody>
@@ -4893,7 +5740,462 @@
 </p:sld>
 </file>
 
-<file path=ppt/slides/slide3.xml><?xml version="1.0" encoding="utf-8"?>
+<file path=ppt/slides/slide4.xml><?xml version="1.0" encoding="utf-8"?>
+<p:sld xmlns:a="http://schemas.openxmlformats.org/drawingml/2006/main" xmlns:p="http://schemas.openxmlformats.org/presentationml/2006/main" xmlns:r="http://schemas.openxmlformats.org/officeDocument/2006/relationships">
+  <p:cSld>
+    <p:spTree>
+      <p:nvGrpSpPr>
+        <p:cNvPr id="1" name=""/>
+        <p:cNvGrpSpPr/>
+        <p:nvPr/>
+      </p:nvGrpSpPr>
+      <p:grpSpPr/>
+      <p:sp>
+        <p:nvSpPr>
+          <p:cNvPr id="2" name="TextBox 1"/>
+          <p:cNvSpPr txBox="1"/>
+          <p:nvPr/>
+        </p:nvSpPr>
+        <p:spPr>
+          <a:xfrm>
+            <a:off x="548640" y="411480"/>
+            <a:ext cx="11064240" cy="777240"/>
+          </a:xfrm>
+          <a:prstGeom prst="rect">
+            <a:avLst/>
+          </a:prstGeom>
+          <a:noFill/>
+        </p:spPr>
+        <p:txBody>
+          <a:bodyPr wrap="square">
+            <a:noAutofit/>
+          </a:bodyPr>
+          <a:lstStyle/>
+          <a:p>
+            <a:pPr>
+              <a:lnSpc>
+                <a:spcPts val="2200"/>
+              </a:lnSpc>
+            </a:pPr>
+            <a:r>
+              <a:rPr sz="2800" b="1">
+                <a:solidFill>
+                  <a:srgbClr val="1A1A2E"/>
+                </a:solidFill>
+                <a:latin typeface="Calibri"/>
+              </a:rPr>
+              <a:t>Algorithm sketch</a:t>
+            </a:r>
+          </a:p>
+        </p:txBody>
+      </p:sp>
+      <p:sp>
+        <p:nvSpPr>
+          <p:cNvPr id="3" name="TextBox 2"/>
+          <p:cNvSpPr txBox="1"/>
+          <p:nvPr/>
+        </p:nvSpPr>
+        <p:spPr>
+          <a:xfrm>
+            <a:off x="548640" y="1234440"/>
+            <a:ext cx="11064240" cy="4937760"/>
+          </a:xfrm>
+          <a:prstGeom prst="rect">
+            <a:avLst/>
+          </a:prstGeom>
+          <a:noFill/>
+        </p:spPr>
+        <p:txBody>
+          <a:bodyPr wrap="square">
+            <a:noAutofit/>
+          </a:bodyPr>
+          <a:lstStyle/>
+          <a:p>
+            <a:pPr lvl="0" marL="457200" indent="-228600">
+              <a:buFont typeface="Calibri"/>
+              <a:spcAft>
+                <a:spcPts val="1000"/>
+              </a:spcAft>
+              <a:buSzPct val="100000"/>
+              <a:buChar char="•"/>
+              <a:lnSpc>
+                <a:spcPts val="2200"/>
+              </a:lnSpc>
+            </a:pPr>
+            <a:r>
+              <a:rPr sz="2000" b="0">
+                <a:solidFill>
+                  <a:srgbClr val="333333"/>
+                </a:solidFill>
+                <a:latin typeface="Calibri"/>
+              </a:rPr>
+              <a:t>First split yields ABC versus DE at cut three</a:t>
+            </a:r>
+          </a:p>
+          <a:p>
+            <a:pPr lvl="0" marL="457200" indent="-228600">
+              <a:buFont typeface="Calibri"/>
+              <a:spcAft>
+                <a:spcPts val="1000"/>
+              </a:spcAft>
+              <a:buSzPct val="100000"/>
+              <a:buChar char="•"/>
+              <a:lnSpc>
+                <a:spcPts val="2200"/>
+              </a:lnSpc>
+            </a:pPr>
+            <a:r>
+              <a:rPr sz="2000" b="0">
+                <a:solidFill>
+                  <a:srgbClr val="333333"/>
+                </a:solidFill>
+                <a:latin typeface="Calibri"/>
+              </a:rPr>
+              <a:t>For k equals three the sketch bisects ABC next into A B versus C with D E untouched</a:t>
+            </a:r>
+          </a:p>
+        </p:txBody>
+      </p:sp>
+      <p:sp>
+        <p:nvSpPr>
+          <p:cNvPr id="4" name="TextBox 3"/>
+          <p:cNvSpPr txBox="1"/>
+          <p:nvPr/>
+        </p:nvSpPr>
+        <p:spPr>
+          <a:xfrm>
+            <a:off x="548640" y="6355080"/>
+            <a:ext cx="11064240" cy="320040"/>
+          </a:xfrm>
+          <a:prstGeom prst="rect">
+            <a:avLst/>
+          </a:prstGeom>
+          <a:noFill/>
+        </p:spPr>
+        <p:txBody>
+          <a:bodyPr wrap="square">
+            <a:noAutofit/>
+          </a:bodyPr>
+          <a:lstStyle/>
+          <a:p>
+            <a:pPr algn="r">
+              <a:lnSpc>
+                <a:spcPts val="2200"/>
+              </a:lnSpc>
+              <a:defRPr sz="1000" b="0">
+                <a:solidFill>
+                  <a:srgbClr val="666666"/>
+                </a:solidFill>
+                <a:latin typeface="Calibri"/>
+              </a:defRPr>
+            </a:pPr>
+            <a:r>
+              <a:t>learn_partitioning — 07 recursive bisection</a:t>
+            </a:r>
+          </a:p>
+        </p:txBody>
+      </p:sp>
+    </p:spTree>
+  </p:cSld>
+  <p:clrMapOvr>
+    <a:masterClrMapping/>
+  </p:clrMapOvr>
+</p:sld>
+</file>
+
+<file path=ppt/slides/slide5.xml><?xml version="1.0" encoding="utf-8"?>
+<p:sld xmlns:a="http://schemas.openxmlformats.org/drawingml/2006/main" xmlns:p="http://schemas.openxmlformats.org/presentationml/2006/main" xmlns:r="http://schemas.openxmlformats.org/officeDocument/2006/relationships">
+  <p:cSld>
+    <p:spTree>
+      <p:nvGrpSpPr>
+        <p:cNvPr id="1" name=""/>
+        <p:cNvGrpSpPr/>
+        <p:nvPr/>
+      </p:nvGrpSpPr>
+      <p:grpSpPr/>
+      <p:sp>
+        <p:nvSpPr>
+          <p:cNvPr id="2" name="TextBox 1"/>
+          <p:cNvSpPr txBox="1"/>
+          <p:nvPr/>
+        </p:nvSpPr>
+        <p:spPr>
+          <a:xfrm>
+            <a:off x="548640" y="411480"/>
+            <a:ext cx="11064240" cy="777240"/>
+          </a:xfrm>
+          <a:prstGeom prst="rect">
+            <a:avLst/>
+          </a:prstGeom>
+          <a:noFill/>
+        </p:spPr>
+        <p:txBody>
+          <a:bodyPr wrap="square">
+            <a:noAutofit/>
+          </a:bodyPr>
+          <a:lstStyle/>
+          <a:p>
+            <a:pPr>
+              <a:lnSpc>
+                <a:spcPts val="2200"/>
+              </a:lnSpc>
+            </a:pPr>
+            <a:r>
+              <a:rPr sz="2800" b="1">
+                <a:solidFill>
+                  <a:srgbClr val="1A1A2E"/>
+                </a:solidFill>
+                <a:latin typeface="Calibri"/>
+              </a:rPr>
+              <a:t>Algorithm sketch — try these</a:t>
+            </a:r>
+          </a:p>
+        </p:txBody>
+      </p:sp>
+      <p:sp>
+        <p:nvSpPr>
+          <p:cNvPr id="3" name="TextBox 2"/>
+          <p:cNvSpPr txBox="1"/>
+          <p:nvPr/>
+        </p:nvSpPr>
+        <p:spPr>
+          <a:xfrm>
+            <a:off x="548640" y="1143000"/>
+            <a:ext cx="11064240" cy="5029200"/>
+          </a:xfrm>
+          <a:prstGeom prst="rect">
+            <a:avLst/>
+          </a:prstGeom>
+          <a:solidFill>
+            <a:srgbClr val="F4F4F4"/>
+          </a:solidFill>
+        </p:spPr>
+        <p:txBody>
+          <a:bodyPr wrap="square">
+            <a:noAutofit/>
+          </a:bodyPr>
+          <a:lstStyle/>
+          <a:p>
+            <a:pPr>
+              <a:lnSpc>
+                <a:spcPts val="2200"/>
+              </a:lnSpc>
+              <a:spcAft>
+                <a:spcPts val="400"/>
+              </a:spcAft>
+            </a:pPr>
+            <a:r>
+              <a:rPr sz="2000" b="0">
+                <a:solidFill>
+                  <a:srgbClr val="333333"/>
+                </a:solidFill>
+                <a:latin typeface="Consolas"/>
+              </a:rPr>
+              <a:t>INPUT: G, target k parts</a:t>
+            </a:r>
+          </a:p>
+          <a:p>
+            <a:pPr>
+              <a:lnSpc>
+                <a:spcPts val="2200"/>
+              </a:lnSpc>
+              <a:spcAft>
+                <a:spcPts val="400"/>
+              </a:spcAft>
+            </a:pPr>
+            <a:r>
+              <a:rPr sz="2000" b="0">
+                <a:solidFill>
+                  <a:srgbClr val="333333"/>
+                </a:solidFill>
+                <a:latin typeface="Consolas"/>
+              </a:rPr>
+              <a:t>OUTPUT: side[v] ∈ {0..k−1}</a:t>
+            </a:r>
+          </a:p>
+          <a:p>
+            <a:pPr>
+              <a:lnSpc>
+                <a:spcPts val="2200"/>
+              </a:lnSpc>
+              <a:spcAft>
+                <a:spcPts val="400"/>
+              </a:spcAft>
+            </a:pPr>
+            <a:r>
+              <a:rPr sz="2000" b="0">
+                <a:solidFill>
+                  <a:srgbClr val="333333"/>
+                </a:solidFill>
+                <a:latin typeface="Consolas"/>
+              </a:rPr>
+              <a:t>parts ← {all nodes}</a:t>
+            </a:r>
+          </a:p>
+          <a:p>
+            <a:pPr>
+              <a:lnSpc>
+                <a:spcPts val="2200"/>
+              </a:lnSpc>
+              <a:spcAft>
+                <a:spcPts val="400"/>
+              </a:spcAft>
+            </a:pPr>
+            <a:r>
+              <a:rPr sz="2000" b="0">
+                <a:solidFill>
+                  <a:srgbClr val="333333"/>
+                </a:solidFill>
+                <a:latin typeface="Consolas"/>
+              </a:rPr>
+              <a:t>while |parts| &lt; k:</a:t>
+            </a:r>
+          </a:p>
+          <a:p>
+            <a:pPr>
+              <a:lnSpc>
+                <a:spcPts val="2200"/>
+              </a:lnSpc>
+              <a:spcAft>
+                <a:spcPts val="400"/>
+              </a:spcAft>
+            </a:pPr>
+            <a:r>
+              <a:rPr sz="2000" b="0">
+                <a:solidFill>
+                  <a:srgbClr val="333333"/>
+                </a:solidFill>
+                <a:latin typeface="Consolas"/>
+              </a:rPr>
+              <a:t>  pick largest part P</a:t>
+            </a:r>
+          </a:p>
+          <a:p>
+            <a:pPr>
+              <a:lnSpc>
+                <a:spcPts val="2200"/>
+              </a:lnSpc>
+              <a:spcAft>
+                <a:spcPts val="400"/>
+              </a:spcAft>
+            </a:pPr>
+            <a:r>
+              <a:rPr sz="2000" b="0">
+                <a:solidFill>
+                  <a:srgbClr val="333333"/>
+                </a:solidFill>
+                <a:latin typeface="Consolas"/>
+              </a:rPr>
+              <a:t>  bipartition P (spectral/KL/FM)</a:t>
+            </a:r>
+          </a:p>
+          <a:p>
+            <a:pPr>
+              <a:lnSpc>
+                <a:spcPts val="2200"/>
+              </a:lnSpc>
+              <a:spcAft>
+                <a:spcPts val="400"/>
+              </a:spcAft>
+            </a:pPr>
+            <a:r>
+              <a:rPr sz="2000" b="0">
+                <a:solidFill>
+                  <a:srgbClr val="333333"/>
+                </a:solidFill>
+                <a:latin typeface="Consolas"/>
+              </a:rPr>
+              <a:t>  replace P with the two halves</a:t>
+            </a:r>
+          </a:p>
+          <a:p>
+            <a:pPr>
+              <a:lnSpc>
+                <a:spcPts val="2200"/>
+              </a:lnSpc>
+              <a:spcAft>
+                <a:spcPts val="400"/>
+              </a:spcAft>
+            </a:pPr>
+            <a:r>
+              <a:rPr sz="2000" b="0">
+                <a:solidFill>
+                  <a:srgbClr val="333333"/>
+                </a:solidFill>
+                <a:latin typeface="Consolas"/>
+              </a:rPr>
+              <a:t>GOLDEN k=2: ABC|DE cut=3</a:t>
+            </a:r>
+          </a:p>
+          <a:p>
+            <a:pPr>
+              <a:lnSpc>
+                <a:spcPts val="2200"/>
+              </a:lnSpc>
+              <a:spcAft>
+                <a:spcPts val="400"/>
+              </a:spcAft>
+            </a:pPr>
+            <a:r>
+              <a:rPr sz="2000" b="0">
+                <a:solidFill>
+                  <a:srgbClr val="333333"/>
+                </a:solidFill>
+                <a:latin typeface="Consolas"/>
+              </a:rPr>
+              <a:t>k=3 continues on ABC → AB|C|DE</a:t>
+            </a:r>
+          </a:p>
+        </p:txBody>
+      </p:sp>
+      <p:sp>
+        <p:nvSpPr>
+          <p:cNvPr id="4" name="TextBox 3"/>
+          <p:cNvSpPr txBox="1"/>
+          <p:nvPr/>
+        </p:nvSpPr>
+        <p:spPr>
+          <a:xfrm>
+            <a:off x="548640" y="6355080"/>
+            <a:ext cx="11064240" cy="320040"/>
+          </a:xfrm>
+          <a:prstGeom prst="rect">
+            <a:avLst/>
+          </a:prstGeom>
+          <a:noFill/>
+        </p:spPr>
+        <p:txBody>
+          <a:bodyPr wrap="square">
+            <a:noAutofit/>
+          </a:bodyPr>
+          <a:lstStyle/>
+          <a:p>
+            <a:pPr algn="r">
+              <a:lnSpc>
+                <a:spcPts val="2200"/>
+              </a:lnSpc>
+              <a:defRPr sz="1000" b="0">
+                <a:solidFill>
+                  <a:srgbClr val="666666"/>
+                </a:solidFill>
+                <a:latin typeface="Calibri"/>
+              </a:defRPr>
+            </a:pPr>
+            <a:r>
+              <a:t>learn_partitioning — 07 recursive bisection</a:t>
+            </a:r>
+          </a:p>
+        </p:txBody>
+      </p:sp>
+    </p:spTree>
+  </p:cSld>
+  <p:clrMapOvr>
+    <a:masterClrMapping/>
+  </p:clrMapOvr>
+</p:sld>
+</file>
+
+<file path=ppt/slides/slide6.xml><?xml version="1.0" encoding="utf-8"?>
 <p:sld xmlns:a="http://schemas.openxmlformats.org/drawingml/2006/main" xmlns:p="http://schemas.openxmlformats.org/presentationml/2006/main" xmlns:r="http://schemas.openxmlformats.org/officeDocument/2006/relationships">
   <p:cSld>
     <p:spTree>
@@ -5052,7 +6354,7 @@
 </p:sld>
 </file>
 
-<file path=ppt/slides/slide4.xml><?xml version="1.0" encoding="utf-8"?>
+<file path=ppt/slides/slide7.xml><?xml version="1.0" encoding="utf-8"?>
 <p:sld xmlns:a="http://schemas.openxmlformats.org/drawingml/2006/main" xmlns:p="http://schemas.openxmlformats.org/presentationml/2006/main" xmlns:r="http://schemas.openxmlformats.org/officeDocument/2006/relationships">
   <p:cSld>
     <p:spTree>
@@ -5211,7 +6513,7 @@
 </p:sld>
 </file>
 
-<file path=ppt/slides/slide5.xml><?xml version="1.0" encoding="utf-8"?>
+<file path=ppt/slides/slide8.xml><?xml version="1.0" encoding="utf-8"?>
 <p:sld xmlns:a="http://schemas.openxmlformats.org/drawingml/2006/main" xmlns:p="http://schemas.openxmlformats.org/presentationml/2006/main" xmlns:r="http://schemas.openxmlformats.org/officeDocument/2006/relationships">
   <p:cSld>
     <p:spTree>
@@ -5370,7 +6672,7 @@
 </p:sld>
 </file>
 
-<file path=ppt/slides/slide6.xml><?xml version="1.0" encoding="utf-8"?>
+<file path=ppt/slides/slide9.xml><?xml version="1.0" encoding="utf-8"?>
 <p:sld xmlns:a="http://schemas.openxmlformats.org/drawingml/2006/main" xmlns:p="http://schemas.openxmlformats.org/presentationml/2006/main" xmlns:r="http://schemas.openxmlformats.org/officeDocument/2006/relationships">
   <p:cSld>
     <p:spTree>
@@ -5485,553 +6787,6 @@
       <p:sp>
         <p:nvSpPr>
           <p:cNvPr id="5" name="TextBox 4"/>
-          <p:cNvSpPr txBox="1"/>
-          <p:nvPr/>
-        </p:nvSpPr>
-        <p:spPr>
-          <a:xfrm>
-            <a:off x="548640" y="6355080"/>
-            <a:ext cx="11064240" cy="320040"/>
-          </a:xfrm>
-          <a:prstGeom prst="rect">
-            <a:avLst/>
-          </a:prstGeom>
-          <a:noFill/>
-        </p:spPr>
-        <p:txBody>
-          <a:bodyPr wrap="square">
-            <a:noAutofit/>
-          </a:bodyPr>
-          <a:lstStyle/>
-          <a:p>
-            <a:pPr algn="r">
-              <a:lnSpc>
-                <a:spcPts val="2200"/>
-              </a:lnSpc>
-              <a:defRPr sz="1000" b="0">
-                <a:solidFill>
-                  <a:srgbClr val="666666"/>
-                </a:solidFill>
-                <a:latin typeface="Calibri"/>
-              </a:defRPr>
-            </a:pPr>
-            <a:r>
-              <a:t>learn_partitioning — 07 recursive bisection</a:t>
-            </a:r>
-          </a:p>
-        </p:txBody>
-      </p:sp>
-    </p:spTree>
-  </p:cSld>
-  <p:clrMapOvr>
-    <a:masterClrMapping/>
-  </p:clrMapOvr>
-</p:sld>
-</file>
-
-<file path=ppt/slides/slide7.xml><?xml version="1.0" encoding="utf-8"?>
-<p:sld xmlns:a="http://schemas.openxmlformats.org/drawingml/2006/main" xmlns:p="http://schemas.openxmlformats.org/presentationml/2006/main" xmlns:r="http://schemas.openxmlformats.org/officeDocument/2006/relationships">
-  <p:cSld>
-    <p:spTree>
-      <p:nvGrpSpPr>
-        <p:cNvPr id="1" name=""/>
-        <p:cNvGrpSpPr/>
-        <p:nvPr/>
-      </p:nvGrpSpPr>
-      <p:grpSpPr/>
-      <p:sp>
-        <p:nvSpPr>
-          <p:cNvPr id="2" name="TextBox 1"/>
-          <p:cNvSpPr txBox="1"/>
-          <p:nvPr/>
-        </p:nvSpPr>
-        <p:spPr>
-          <a:xfrm>
-            <a:off x="548640" y="411480"/>
-            <a:ext cx="11064240" cy="777240"/>
-          </a:xfrm>
-          <a:prstGeom prst="rect">
-            <a:avLst/>
-          </a:prstGeom>
-          <a:noFill/>
-        </p:spPr>
-        <p:txBody>
-          <a:bodyPr wrap="square">
-            <a:noAutofit/>
-          </a:bodyPr>
-          <a:lstStyle/>
-          <a:p>
-            <a:pPr>
-              <a:lnSpc>
-                <a:spcPts val="2200"/>
-              </a:lnSpc>
-            </a:pPr>
-            <a:r>
-              <a:rPr sz="2800" b="1">
-                <a:solidFill>
-                  <a:srgbClr val="1A1A2E"/>
-                </a:solidFill>
-                <a:latin typeface="Calibri"/>
-              </a:rPr>
-              <a:t>Recursive bisection tradeoff</a:t>
-            </a:r>
-          </a:p>
-        </p:txBody>
-      </p:sp>
-      <p:pic>
-        <p:nvPicPr>
-          <p:cNvPr id="3" name="Picture 2" descr="05-takeaway.png"/>
-          <p:cNvPicPr>
-            <a:picLocks noChangeAspect="1"/>
-          </p:cNvPicPr>
-          <p:nvPr/>
-        </p:nvPicPr>
-        <p:blipFill>
-          <a:blip r:embed="rId2"/>
-          <a:stretch>
-            <a:fillRect/>
-          </a:stretch>
-        </p:blipFill>
-        <p:spPr>
-          <a:xfrm>
-            <a:off x="548640" y="1143000"/>
-            <a:ext cx="9404113" cy="4572000"/>
-          </a:xfrm>
-          <a:prstGeom prst="rect">
-            <a:avLst/>
-          </a:prstGeom>
-        </p:spPr>
-      </p:pic>
-      <p:sp>
-        <p:nvSpPr>
-          <p:cNvPr id="4" name="TextBox 3"/>
-          <p:cNvSpPr txBox="1"/>
-          <p:nvPr/>
-        </p:nvSpPr>
-        <p:spPr>
-          <a:xfrm>
-            <a:off x="548640" y="5897880"/>
-            <a:ext cx="11064240" cy="411480"/>
-          </a:xfrm>
-          <a:prstGeom prst="rect">
-            <a:avLst/>
-          </a:prstGeom>
-          <a:noFill/>
-        </p:spPr>
-        <p:txBody>
-          <a:bodyPr wrap="square">
-            <a:noAutofit/>
-          </a:bodyPr>
-          <a:lstStyle/>
-          <a:p>
-            <a:pPr>
-              <a:lnSpc>
-                <a:spcPts val="2200"/>
-              </a:lnSpc>
-            </a:pPr>
-            <a:r>
-              <a:rPr sz="1200" b="0">
-                <a:solidFill>
-                  <a:srgbClr val="333333"/>
-                </a:solidFill>
-                <a:latin typeface="Calibri"/>
-              </a:rPr>
-              <a:t>Recursive bisection tradeoff</a:t>
-            </a:r>
-          </a:p>
-        </p:txBody>
-      </p:sp>
-      <p:sp>
-        <p:nvSpPr>
-          <p:cNvPr id="5" name="TextBox 4"/>
-          <p:cNvSpPr txBox="1"/>
-          <p:nvPr/>
-        </p:nvSpPr>
-        <p:spPr>
-          <a:xfrm>
-            <a:off x="548640" y="6355080"/>
-            <a:ext cx="11064240" cy="320040"/>
-          </a:xfrm>
-          <a:prstGeom prst="rect">
-            <a:avLst/>
-          </a:prstGeom>
-          <a:noFill/>
-        </p:spPr>
-        <p:txBody>
-          <a:bodyPr wrap="square">
-            <a:noAutofit/>
-          </a:bodyPr>
-          <a:lstStyle/>
-          <a:p>
-            <a:pPr algn="r">
-              <a:lnSpc>
-                <a:spcPts val="2200"/>
-              </a:lnSpc>
-              <a:defRPr sz="1000" b="0">
-                <a:solidFill>
-                  <a:srgbClr val="666666"/>
-                </a:solidFill>
-                <a:latin typeface="Calibri"/>
-              </a:defRPr>
-            </a:pPr>
-            <a:r>
-              <a:t>learn_partitioning — 07 recursive bisection</a:t>
-            </a:r>
-          </a:p>
-        </p:txBody>
-      </p:sp>
-    </p:spTree>
-  </p:cSld>
-  <p:clrMapOvr>
-    <a:masterClrMapping/>
-  </p:clrMapOvr>
-</p:sld>
-</file>
-
-<file path=ppt/slides/slide8.xml><?xml version="1.0" encoding="utf-8"?>
-<p:sld xmlns:a="http://schemas.openxmlformats.org/drawingml/2006/main" xmlns:p="http://schemas.openxmlformats.org/presentationml/2006/main" xmlns:r="http://schemas.openxmlformats.org/officeDocument/2006/relationships">
-  <p:cSld>
-    <p:spTree>
-      <p:nvGrpSpPr>
-        <p:cNvPr id="1" name=""/>
-        <p:cNvGrpSpPr/>
-        <p:nvPr/>
-      </p:nvGrpSpPr>
-      <p:grpSpPr/>
-      <p:sp>
-        <p:nvSpPr>
-          <p:cNvPr id="2" name="TextBox 1"/>
-          <p:cNvSpPr txBox="1"/>
-          <p:nvPr/>
-        </p:nvSpPr>
-        <p:spPr>
-          <a:xfrm>
-            <a:off x="548640" y="411480"/>
-            <a:ext cx="11064240" cy="777240"/>
-          </a:xfrm>
-          <a:prstGeom prst="rect">
-            <a:avLst/>
-          </a:prstGeom>
-          <a:noFill/>
-        </p:spPr>
-        <p:txBody>
-          <a:bodyPr wrap="square">
-            <a:noAutofit/>
-          </a:bodyPr>
-          <a:lstStyle/>
-          <a:p>
-            <a:pPr>
-              <a:lnSpc>
-                <a:spcPts val="2200"/>
-              </a:lnSpc>
-            </a:pPr>
-            <a:r>
-              <a:rPr sz="2800" b="1">
-                <a:solidFill>
-                  <a:srgbClr val="1A1A2E"/>
-                </a:solidFill>
-                <a:latin typeface="Calibri"/>
-              </a:rPr>
-              <a:t>Browser lab track</a:t>
-            </a:r>
-          </a:p>
-        </p:txBody>
-      </p:sp>
-      <p:sp>
-        <p:nvSpPr>
-          <p:cNvPr id="3" name="TextBox 2"/>
-          <p:cNvSpPr txBox="1"/>
-          <p:nvPr/>
-        </p:nvSpPr>
-        <p:spPr>
-          <a:xfrm>
-            <a:off x="548640" y="1234440"/>
-            <a:ext cx="11064240" cy="4937760"/>
-          </a:xfrm>
-          <a:prstGeom prst="rect">
-            <a:avLst/>
-          </a:prstGeom>
-          <a:noFill/>
-        </p:spPr>
-        <p:txBody>
-          <a:bodyPr wrap="square">
-            <a:noAutofit/>
-          </a:bodyPr>
-          <a:lstStyle/>
-          <a:p>
-            <a:pPr lvl="0" marL="457200" indent="-228600">
-              <a:buFont typeface="Calibri"/>
-              <a:spcAft>
-                <a:spcPts val="1000"/>
-              </a:spcAft>
-              <a:buSzPct val="100000"/>
-              <a:buChar char="•"/>
-              <a:lnSpc>
-                <a:spcPts val="2200"/>
-              </a:lnSpc>
-            </a:pPr>
-            <a:r>
-              <a:rPr sz="2000" b="0">
-                <a:solidFill>
-                  <a:srgbClr val="333333"/>
-                </a:solidFill>
-                <a:latin typeface="Calibri"/>
-              </a:rPr>
-              <a:t>In the browser lab track, open the </a:t>
-            </a:r>
-            <a:r>
-              <a:rPr sz="2000" b="1">
-                <a:solidFill>
-                  <a:srgbClr val="333333"/>
-                </a:solidFill>
-                <a:latin typeface="Calibri"/>
-              </a:rPr>
-              <a:t>recursive-bisection</a:t>
-            </a:r>
-            <a:r>
-              <a:rPr sz="2000" b="0">
-                <a:solidFill>
-                  <a:srgbClr val="333333"/>
-                </a:solidFill>
-                <a:latin typeface="Calibri"/>
-              </a:rPr>
-              <a:t> lab from the tools shelf</a:t>
-            </a:r>
-          </a:p>
-          <a:p>
-            <a:pPr lvl="0" marL="457200" indent="-228600">
-              <a:buFont typeface="Calibri"/>
-              <a:spcAft>
-                <a:spcPts val="1000"/>
-              </a:spcAft>
-              <a:buSzPct val="100000"/>
-              <a:buChar char="•"/>
-              <a:lnSpc>
-                <a:spcPts val="2200"/>
-              </a:lnSpc>
-            </a:pPr>
-            <a:r>
-              <a:rPr sz="2000" b="0">
-                <a:solidFill>
-                  <a:srgbClr val="333333"/>
-                </a:solidFill>
-                <a:latin typeface="Calibri"/>
-              </a:rPr>
-              <a:t>Load the starter graph, run the algorithm once</a:t>
-            </a:r>
-          </a:p>
-          <a:p>
-            <a:pPr lvl="0" marL="457200" indent="-228600">
-              <a:buFont typeface="Calibri"/>
-              <a:spcAft>
-                <a:spcPts val="1000"/>
-              </a:spcAft>
-              <a:buSzPct val="100000"/>
-              <a:buChar char="•"/>
-              <a:lnSpc>
-                <a:spcPts val="2200"/>
-              </a:lnSpc>
-            </a:pPr>
-            <a:r>
-              <a:rPr sz="2000" b="0">
-                <a:solidFill>
-                  <a:srgbClr val="333333"/>
-                </a:solidFill>
-                <a:latin typeface="Calibri"/>
-              </a:rPr>
-              <a:t>Work the challenges that lock the goldens</a:t>
-            </a:r>
-          </a:p>
-        </p:txBody>
-      </p:sp>
-      <p:sp>
-        <p:nvSpPr>
-          <p:cNvPr id="4" name="TextBox 3"/>
-          <p:cNvSpPr txBox="1"/>
-          <p:nvPr/>
-        </p:nvSpPr>
-        <p:spPr>
-          <a:xfrm>
-            <a:off x="548640" y="6355080"/>
-            <a:ext cx="11064240" cy="320040"/>
-          </a:xfrm>
-          <a:prstGeom prst="rect">
-            <a:avLst/>
-          </a:prstGeom>
-          <a:noFill/>
-        </p:spPr>
-        <p:txBody>
-          <a:bodyPr wrap="square">
-            <a:noAutofit/>
-          </a:bodyPr>
-          <a:lstStyle/>
-          <a:p>
-            <a:pPr algn="r">
-              <a:lnSpc>
-                <a:spcPts val="2200"/>
-              </a:lnSpc>
-              <a:defRPr sz="1000" b="0">
-                <a:solidFill>
-                  <a:srgbClr val="666666"/>
-                </a:solidFill>
-                <a:latin typeface="Calibri"/>
-              </a:defRPr>
-            </a:pPr>
-            <a:r>
-              <a:t>learn_partitioning — 07 recursive bisection</a:t>
-            </a:r>
-          </a:p>
-        </p:txBody>
-      </p:sp>
-    </p:spTree>
-  </p:cSld>
-  <p:clrMapOvr>
-    <a:masterClrMapping/>
-  </p:clrMapOvr>
-</p:sld>
-</file>
-
-<file path=ppt/slides/slide9.xml><?xml version="1.0" encoding="utf-8"?>
-<p:sld xmlns:a="http://schemas.openxmlformats.org/drawingml/2006/main" xmlns:p="http://schemas.openxmlformats.org/presentationml/2006/main" xmlns:r="http://schemas.openxmlformats.org/officeDocument/2006/relationships">
-  <p:cSld>
-    <p:spTree>
-      <p:nvGrpSpPr>
-        <p:cNvPr id="1" name=""/>
-        <p:cNvGrpSpPr/>
-        <p:nvPr/>
-      </p:nvGrpSpPr>
-      <p:grpSpPr/>
-      <p:sp>
-        <p:nvSpPr>
-          <p:cNvPr id="2" name="TextBox 1"/>
-          <p:cNvSpPr txBox="1"/>
-          <p:nvPr/>
-        </p:nvSpPr>
-        <p:spPr>
-          <a:xfrm>
-            <a:off x="548640" y="411480"/>
-            <a:ext cx="11064240" cy="777240"/>
-          </a:xfrm>
-          <a:prstGeom prst="rect">
-            <a:avLst/>
-          </a:prstGeom>
-          <a:noFill/>
-        </p:spPr>
-        <p:txBody>
-          <a:bodyPr wrap="square">
-            <a:noAutofit/>
-          </a:bodyPr>
-          <a:lstStyle/>
-          <a:p>
-            <a:pPr>
-              <a:lnSpc>
-                <a:spcPts val="2200"/>
-              </a:lnSpc>
-            </a:pPr>
-            <a:r>
-              <a:rPr sz="2800" b="1">
-                <a:solidFill>
-                  <a:srgbClr val="1A1A2E"/>
-                </a:solidFill>
-                <a:latin typeface="Calibri"/>
-              </a:rPr>
-              <a:t>Implement track</a:t>
-            </a:r>
-          </a:p>
-        </p:txBody>
-      </p:sp>
-      <p:sp>
-        <p:nvSpPr>
-          <p:cNvPr id="3" name="TextBox 2"/>
-          <p:cNvSpPr txBox="1"/>
-          <p:nvPr/>
-        </p:nvSpPr>
-        <p:spPr>
-          <a:xfrm>
-            <a:off x="548640" y="1234440"/>
-            <a:ext cx="11064240" cy="4937760"/>
-          </a:xfrm>
-          <a:prstGeom prst="rect">
-            <a:avLst/>
-          </a:prstGeom>
-          <a:noFill/>
-        </p:spPr>
-        <p:txBody>
-          <a:bodyPr wrap="square">
-            <a:noAutofit/>
-          </a:bodyPr>
-          <a:lstStyle/>
-          <a:p>
-            <a:pPr lvl="0" marL="457200" indent="-228600">
-              <a:buFont typeface="Calibri"/>
-              <a:spcAft>
-                <a:spcPts val="1000"/>
-              </a:spcAft>
-              <a:buSzPct val="100000"/>
-              <a:buChar char="•"/>
-              <a:lnSpc>
-                <a:spcPts val="2200"/>
-              </a:lnSpc>
-            </a:pPr>
-            <a:r>
-              <a:rPr sz="2000" b="0">
-                <a:solidFill>
-                  <a:srgbClr val="333333"/>
-                </a:solidFill>
-                <a:latin typeface="Calibri"/>
-              </a:rPr>
-              <a:t>In the implement track, open this module’s examples and the course `common/` solvers</a:t>
-            </a:r>
-          </a:p>
-          <a:p>
-            <a:pPr lvl="0" marL="457200" indent="-228600">
-              <a:buFont typeface="Calibri"/>
-              <a:spcAft>
-                <a:spcPts val="1000"/>
-              </a:spcAft>
-              <a:buSzPct val="100000"/>
-              <a:buChar char="•"/>
-              <a:lnSpc>
-                <a:spcPts val="2200"/>
-              </a:lnSpc>
-            </a:pPr>
-            <a:r>
-              <a:rPr sz="2000" b="0">
-                <a:solidFill>
-                  <a:srgbClr val="333333"/>
-                </a:solidFill>
-                <a:latin typeface="Calibri"/>
-              </a:rPr>
-              <a:t>Parse the tiny graph, run the algorithm with a deterministic seed</a:t>
-            </a:r>
-          </a:p>
-          <a:p>
-            <a:pPr lvl="0" marL="457200" indent="-228600">
-              <a:buFont typeface="Calibri"/>
-              <a:spcAft>
-                <a:spcPts val="1000"/>
-              </a:spcAft>
-              <a:buSzPct val="100000"/>
-              <a:buChar char="•"/>
-              <a:lnSpc>
-                <a:spcPts val="2200"/>
-              </a:lnSpc>
-            </a:pPr>
-            <a:r>
-              <a:rPr sz="2000" b="0">
-                <a:solidFill>
-                  <a:srgbClr val="333333"/>
-                </a:solidFill>
-                <a:latin typeface="Calibri"/>
-              </a:rPr>
-              <a:t>Match the browser goldens before you claim the checklist</a:t>
-            </a:r>
-          </a:p>
-        </p:txBody>
-      </p:sp>
-      <p:sp>
-        <p:nvSpPr>
-          <p:cNvPr id="4" name="TextBox 3"/>
           <p:cNvSpPr txBox="1"/>
           <p:nvPr/>
         </p:nvSpPr>
